--- a/Context/Notas reuniones/Esquema.pptx
+++ b/Context/Notas reuniones/Esquema.pptx
@@ -2,10 +2,13 @@
 <file path=ppt/presentation.xml><?xml version="1.0" encoding="utf-8"?>
 <p:presentation xmlns:a="http://schemas.openxmlformats.org/drawingml/2006/main" xmlns:r="http://schemas.openxmlformats.org/officeDocument/2006/relationships" xmlns:p="http://schemas.openxmlformats.org/presentationml/2006/main" saveSubsetFonts="1">
   <p:sldMasterIdLst>
-    <p:sldMasterId id="2147483648" r:id="rId1"/>
+    <p:sldMasterId id="2147483648" r:id="rId4"/>
   </p:sldMasterIdLst>
+  <p:notesMasterIdLst>
+    <p:notesMasterId r:id="rId6"/>
+  </p:notesMasterIdLst>
   <p:sldIdLst>
-    <p:sldId id="256" r:id="rId2"/>
+    <p:sldId id="256" r:id="rId5"/>
   </p:sldIdLst>
   <p:sldSz cx="12192000" cy="6858000"/>
   <p:notesSz cx="6858000" cy="9144000"/>
@@ -104,6 +107,11 @@
       </a:defRPr>
     </a:lvl9pPr>
   </p:defaultTextStyle>
+  <p:extLst>
+    <p:ext uri="{EFAFB233-063F-42B5-8137-9DF3F51BA10A}">
+      <p15:sldGuideLst xmlns:p15="http://schemas.microsoft.com/office/powerpoint/2012/main"/>
+    </p:ext>
+  </p:extLst>
 </p:presentation>
 </file>
 
@@ -168,6 +176,439 @@
 </pc:chgInfo>
 </file>
 
+<file path=ppt/notesMasters/notesMaster1.xml><?xml version="1.0" encoding="utf-8"?>
+<p:notesMaster xmlns:a="http://schemas.openxmlformats.org/drawingml/2006/main" xmlns:r="http://schemas.openxmlformats.org/officeDocument/2006/relationships" xmlns:p="http://schemas.openxmlformats.org/presentationml/2006/main">
+  <p:cSld>
+    <p:bg>
+      <p:bgRef idx="1001">
+        <a:schemeClr val="bg1"/>
+      </p:bgRef>
+    </p:bg>
+    <p:spTree>
+      <p:nvGrpSpPr>
+        <p:cNvPr id="1" name=""/>
+        <p:cNvGrpSpPr/>
+        <p:nvPr/>
+      </p:nvGrpSpPr>
+      <p:grpSpPr>
+        <a:xfrm>
+          <a:off x="0" y="0"/>
+          <a:ext cx="0" cy="0"/>
+          <a:chOff x="0" y="0"/>
+          <a:chExt cx="0" cy="0"/>
+        </a:xfrm>
+      </p:grpSpPr>
+      <p:sp>
+        <p:nvSpPr>
+          <p:cNvPr id="2" name="Marcador de encabezado 1"/>
+          <p:cNvSpPr>
+            <a:spLocks noGrp="1"/>
+          </p:cNvSpPr>
+          <p:nvPr>
+            <p:ph type="hdr" sz="quarter"/>
+          </p:nvPr>
+        </p:nvSpPr>
+        <p:spPr>
+          <a:xfrm>
+            <a:off x="0" y="0"/>
+            <a:ext cx="2971800" cy="458788"/>
+          </a:xfrm>
+          <a:prstGeom prst="rect">
+            <a:avLst/>
+          </a:prstGeom>
+        </p:spPr>
+        <p:txBody>
+          <a:bodyPr vert="horz" lIns="91440" tIns="45720" rIns="91440" bIns="45720" rtlCol="0"/>
+          <a:lstStyle>
+            <a:lvl1pPr algn="l">
+              <a:defRPr sz="1200"/>
+            </a:lvl1pPr>
+          </a:lstStyle>
+          <a:p>
+            <a:endParaRPr lang="es-ES"/>
+          </a:p>
+        </p:txBody>
+      </p:sp>
+      <p:sp>
+        <p:nvSpPr>
+          <p:cNvPr id="3" name="Marcador de fecha 2"/>
+          <p:cNvSpPr>
+            <a:spLocks noGrp="1"/>
+          </p:cNvSpPr>
+          <p:nvPr>
+            <p:ph type="dt" idx="1"/>
+          </p:nvPr>
+        </p:nvSpPr>
+        <p:spPr>
+          <a:xfrm>
+            <a:off x="3884613" y="0"/>
+            <a:ext cx="2971800" cy="458788"/>
+          </a:xfrm>
+          <a:prstGeom prst="rect">
+            <a:avLst/>
+          </a:prstGeom>
+        </p:spPr>
+        <p:txBody>
+          <a:bodyPr vert="horz" lIns="91440" tIns="45720" rIns="91440" bIns="45720" rtlCol="0"/>
+          <a:lstStyle>
+            <a:lvl1pPr algn="r">
+              <a:defRPr sz="1200"/>
+            </a:lvl1pPr>
+          </a:lstStyle>
+          <a:p>
+            <a:fld id="{8D0340E0-F19B-4914-81C8-459129C464F7}" type="datetimeFigureOut">
+              <a:rPr lang="es-ES" smtClean="0"/>
+              <a:t>23/03/2026</a:t>
+            </a:fld>
+            <a:endParaRPr lang="es-ES"/>
+          </a:p>
+        </p:txBody>
+      </p:sp>
+      <p:sp>
+        <p:nvSpPr>
+          <p:cNvPr id="4" name="Marcador de imagen de diapositiva 3"/>
+          <p:cNvSpPr>
+            <a:spLocks noGrp="1" noRot="1" noChangeAspect="1"/>
+          </p:cNvSpPr>
+          <p:nvPr>
+            <p:ph type="sldImg" idx="2"/>
+          </p:nvPr>
+        </p:nvSpPr>
+        <p:spPr>
+          <a:xfrm>
+            <a:off x="685800" y="1143000"/>
+            <a:ext cx="5486400" cy="3086100"/>
+          </a:xfrm>
+          <a:prstGeom prst="rect">
+            <a:avLst/>
+          </a:prstGeom>
+          <a:noFill/>
+          <a:ln w="12700">
+            <a:solidFill>
+              <a:prstClr val="black"/>
+            </a:solidFill>
+          </a:ln>
+        </p:spPr>
+        <p:txBody>
+          <a:bodyPr vert="horz" lIns="91440" tIns="45720" rIns="91440" bIns="45720" rtlCol="0" anchor="ctr"/>
+          <a:lstStyle/>
+          <a:p>
+            <a:endParaRPr lang="es-ES"/>
+          </a:p>
+        </p:txBody>
+      </p:sp>
+      <p:sp>
+        <p:nvSpPr>
+          <p:cNvPr id="5" name="Marcador de notas 4"/>
+          <p:cNvSpPr>
+            <a:spLocks noGrp="1"/>
+          </p:cNvSpPr>
+          <p:nvPr>
+            <p:ph type="body" sz="quarter" idx="3"/>
+          </p:nvPr>
+        </p:nvSpPr>
+        <p:spPr>
+          <a:xfrm>
+            <a:off x="685800" y="4400550"/>
+            <a:ext cx="5486400" cy="3600450"/>
+          </a:xfrm>
+          <a:prstGeom prst="rect">
+            <a:avLst/>
+          </a:prstGeom>
+        </p:spPr>
+        <p:txBody>
+          <a:bodyPr vert="horz" lIns="91440" tIns="45720" rIns="91440" bIns="45720" rtlCol="0"/>
+          <a:lstStyle/>
+          <a:p>
+            <a:pPr lvl="0"/>
+            <a:r>
+              <a:rPr lang="es-ES"/>
+              <a:t>Haga clic para modificar los estilos de texto del patrón</a:t>
+            </a:r>
+          </a:p>
+          <a:p>
+            <a:pPr lvl="1"/>
+            <a:r>
+              <a:rPr lang="es-ES"/>
+              <a:t>Segundo nivel</a:t>
+            </a:r>
+          </a:p>
+          <a:p>
+            <a:pPr lvl="2"/>
+            <a:r>
+              <a:rPr lang="es-ES"/>
+              <a:t>Tercer nivel</a:t>
+            </a:r>
+          </a:p>
+          <a:p>
+            <a:pPr lvl="3"/>
+            <a:r>
+              <a:rPr lang="es-ES"/>
+              <a:t>Cuarto nivel</a:t>
+            </a:r>
+          </a:p>
+          <a:p>
+            <a:pPr lvl="4"/>
+            <a:r>
+              <a:rPr lang="es-ES"/>
+              <a:t>Quinto nivel</a:t>
+            </a:r>
+          </a:p>
+        </p:txBody>
+      </p:sp>
+      <p:sp>
+        <p:nvSpPr>
+          <p:cNvPr id="6" name="Marcador de pie de página 5"/>
+          <p:cNvSpPr>
+            <a:spLocks noGrp="1"/>
+          </p:cNvSpPr>
+          <p:nvPr>
+            <p:ph type="ftr" sz="quarter" idx="4"/>
+          </p:nvPr>
+        </p:nvSpPr>
+        <p:spPr>
+          <a:xfrm>
+            <a:off x="0" y="8685213"/>
+            <a:ext cx="2971800" cy="458787"/>
+          </a:xfrm>
+          <a:prstGeom prst="rect">
+            <a:avLst/>
+          </a:prstGeom>
+        </p:spPr>
+        <p:txBody>
+          <a:bodyPr vert="horz" lIns="91440" tIns="45720" rIns="91440" bIns="45720" rtlCol="0" anchor="b"/>
+          <a:lstStyle>
+            <a:lvl1pPr algn="l">
+              <a:defRPr sz="1200"/>
+            </a:lvl1pPr>
+          </a:lstStyle>
+          <a:p>
+            <a:endParaRPr lang="es-ES"/>
+          </a:p>
+        </p:txBody>
+      </p:sp>
+      <p:sp>
+        <p:nvSpPr>
+          <p:cNvPr id="7" name="Marcador de número de diapositiva 6"/>
+          <p:cNvSpPr>
+            <a:spLocks noGrp="1"/>
+          </p:cNvSpPr>
+          <p:nvPr>
+            <p:ph type="sldNum" sz="quarter" idx="5"/>
+          </p:nvPr>
+        </p:nvSpPr>
+        <p:spPr>
+          <a:xfrm>
+            <a:off x="3884613" y="8685213"/>
+            <a:ext cx="2971800" cy="458787"/>
+          </a:xfrm>
+          <a:prstGeom prst="rect">
+            <a:avLst/>
+          </a:prstGeom>
+        </p:spPr>
+        <p:txBody>
+          <a:bodyPr vert="horz" lIns="91440" tIns="45720" rIns="91440" bIns="45720" rtlCol="0" anchor="b"/>
+          <a:lstStyle>
+            <a:lvl1pPr algn="r">
+              <a:defRPr sz="1200"/>
+            </a:lvl1pPr>
+          </a:lstStyle>
+          <a:p>
+            <a:fld id="{12C7B320-7803-4B03-9B34-37C61C4D2179}" type="slidenum">
+              <a:rPr lang="es-ES" smtClean="0"/>
+              <a:t>‹Nº›</a:t>
+            </a:fld>
+            <a:endParaRPr lang="es-ES"/>
+          </a:p>
+        </p:txBody>
+      </p:sp>
+    </p:spTree>
+    <p:extLst>
+      <p:ext uri="{BB962C8B-B14F-4D97-AF65-F5344CB8AC3E}">
+        <p14:creationId xmlns:p14="http://schemas.microsoft.com/office/powerpoint/2010/main" val="1713539751"/>
+      </p:ext>
+    </p:extLst>
+  </p:cSld>
+  <p:clrMap bg1="lt1" tx1="dk1" bg2="lt2" tx2="dk2" accent1="accent1" accent2="accent2" accent3="accent3" accent4="accent4" accent5="accent5" accent6="accent6" hlink="hlink" folHlink="folHlink"/>
+  <p:notesStyle>
+    <a:lvl1pPr marL="0" algn="l" defTabSz="914400" rtl="0" eaLnBrk="1" latinLnBrk="0" hangingPunct="1">
+      <a:defRPr sz="1200" kern="1200">
+        <a:solidFill>
+          <a:schemeClr val="tx1"/>
+        </a:solidFill>
+        <a:latin typeface="+mn-lt"/>
+        <a:ea typeface="+mn-ea"/>
+        <a:cs typeface="+mn-cs"/>
+      </a:defRPr>
+    </a:lvl1pPr>
+    <a:lvl2pPr marL="457200" algn="l" defTabSz="914400" rtl="0" eaLnBrk="1" latinLnBrk="0" hangingPunct="1">
+      <a:defRPr sz="1200" kern="1200">
+        <a:solidFill>
+          <a:schemeClr val="tx1"/>
+        </a:solidFill>
+        <a:latin typeface="+mn-lt"/>
+        <a:ea typeface="+mn-ea"/>
+        <a:cs typeface="+mn-cs"/>
+      </a:defRPr>
+    </a:lvl2pPr>
+    <a:lvl3pPr marL="914400" algn="l" defTabSz="914400" rtl="0" eaLnBrk="1" latinLnBrk="0" hangingPunct="1">
+      <a:defRPr sz="1200" kern="1200">
+        <a:solidFill>
+          <a:schemeClr val="tx1"/>
+        </a:solidFill>
+        <a:latin typeface="+mn-lt"/>
+        <a:ea typeface="+mn-ea"/>
+        <a:cs typeface="+mn-cs"/>
+      </a:defRPr>
+    </a:lvl3pPr>
+    <a:lvl4pPr marL="1371600" algn="l" defTabSz="914400" rtl="0" eaLnBrk="1" latinLnBrk="0" hangingPunct="1">
+      <a:defRPr sz="1200" kern="1200">
+        <a:solidFill>
+          <a:schemeClr val="tx1"/>
+        </a:solidFill>
+        <a:latin typeface="+mn-lt"/>
+        <a:ea typeface="+mn-ea"/>
+        <a:cs typeface="+mn-cs"/>
+      </a:defRPr>
+    </a:lvl4pPr>
+    <a:lvl5pPr marL="1828800" algn="l" defTabSz="914400" rtl="0" eaLnBrk="1" latinLnBrk="0" hangingPunct="1">
+      <a:defRPr sz="1200" kern="1200">
+        <a:solidFill>
+          <a:schemeClr val="tx1"/>
+        </a:solidFill>
+        <a:latin typeface="+mn-lt"/>
+        <a:ea typeface="+mn-ea"/>
+        <a:cs typeface="+mn-cs"/>
+      </a:defRPr>
+    </a:lvl5pPr>
+    <a:lvl6pPr marL="2286000" algn="l" defTabSz="914400" rtl="0" eaLnBrk="1" latinLnBrk="0" hangingPunct="1">
+      <a:defRPr sz="1200" kern="1200">
+        <a:solidFill>
+          <a:schemeClr val="tx1"/>
+        </a:solidFill>
+        <a:latin typeface="+mn-lt"/>
+        <a:ea typeface="+mn-ea"/>
+        <a:cs typeface="+mn-cs"/>
+      </a:defRPr>
+    </a:lvl6pPr>
+    <a:lvl7pPr marL="2743200" algn="l" defTabSz="914400" rtl="0" eaLnBrk="1" latinLnBrk="0" hangingPunct="1">
+      <a:defRPr sz="1200" kern="1200">
+        <a:solidFill>
+          <a:schemeClr val="tx1"/>
+        </a:solidFill>
+        <a:latin typeface="+mn-lt"/>
+        <a:ea typeface="+mn-ea"/>
+        <a:cs typeface="+mn-cs"/>
+      </a:defRPr>
+    </a:lvl7pPr>
+    <a:lvl8pPr marL="3200400" algn="l" defTabSz="914400" rtl="0" eaLnBrk="1" latinLnBrk="0" hangingPunct="1">
+      <a:defRPr sz="1200" kern="1200">
+        <a:solidFill>
+          <a:schemeClr val="tx1"/>
+        </a:solidFill>
+        <a:latin typeface="+mn-lt"/>
+        <a:ea typeface="+mn-ea"/>
+        <a:cs typeface="+mn-cs"/>
+      </a:defRPr>
+    </a:lvl8pPr>
+    <a:lvl9pPr marL="3657600" algn="l" defTabSz="914400" rtl="0" eaLnBrk="1" latinLnBrk="0" hangingPunct="1">
+      <a:defRPr sz="1200" kern="1200">
+        <a:solidFill>
+          <a:schemeClr val="tx1"/>
+        </a:solidFill>
+        <a:latin typeface="+mn-lt"/>
+        <a:ea typeface="+mn-ea"/>
+        <a:cs typeface="+mn-cs"/>
+      </a:defRPr>
+    </a:lvl9pPr>
+  </p:notesStyle>
+</p:notesMaster>
+</file>
+
+<file path=ppt/notesSlides/notesSlide1.xml><?xml version="1.0" encoding="utf-8"?>
+<p:notes xmlns:a="http://schemas.openxmlformats.org/drawingml/2006/main" xmlns:r="http://schemas.openxmlformats.org/officeDocument/2006/relationships" xmlns:p="http://schemas.openxmlformats.org/presentationml/2006/main">
+  <p:cSld>
+    <p:spTree>
+      <p:nvGrpSpPr>
+        <p:cNvPr id="1" name=""/>
+        <p:cNvGrpSpPr/>
+        <p:nvPr/>
+      </p:nvGrpSpPr>
+      <p:grpSpPr>
+        <a:xfrm>
+          <a:off x="0" y="0"/>
+          <a:ext cx="0" cy="0"/>
+          <a:chOff x="0" y="0"/>
+          <a:chExt cx="0" cy="0"/>
+        </a:xfrm>
+      </p:grpSpPr>
+      <p:sp>
+        <p:nvSpPr>
+          <p:cNvPr id="2" name="Marcador de imagen de diapositiva 1"/>
+          <p:cNvSpPr>
+            <a:spLocks noGrp="1" noRot="1" noChangeAspect="1"/>
+          </p:cNvSpPr>
+          <p:nvPr>
+            <p:ph type="sldImg"/>
+          </p:nvPr>
+        </p:nvSpPr>
+        <p:spPr/>
+      </p:sp>
+      <p:sp>
+        <p:nvSpPr>
+          <p:cNvPr id="3" name="Marcador de notas 2"/>
+          <p:cNvSpPr>
+            <a:spLocks noGrp="1"/>
+          </p:cNvSpPr>
+          <p:nvPr>
+            <p:ph type="body" idx="1"/>
+          </p:nvPr>
+        </p:nvSpPr>
+        <p:spPr/>
+        <p:txBody>
+          <a:bodyPr/>
+          <a:lstStyle/>
+          <a:p>
+            <a:endParaRPr lang="es-ES" dirty="0"/>
+          </a:p>
+        </p:txBody>
+      </p:sp>
+      <p:sp>
+        <p:nvSpPr>
+          <p:cNvPr id="4" name="Marcador de número de diapositiva 3"/>
+          <p:cNvSpPr>
+            <a:spLocks noGrp="1"/>
+          </p:cNvSpPr>
+          <p:nvPr>
+            <p:ph type="sldNum" sz="quarter" idx="5"/>
+          </p:nvPr>
+        </p:nvSpPr>
+        <p:spPr/>
+        <p:txBody>
+          <a:bodyPr/>
+          <a:lstStyle/>
+          <a:p>
+            <a:fld id="{12C7B320-7803-4B03-9B34-37C61C4D2179}" type="slidenum">
+              <a:rPr lang="es-ES" smtClean="0"/>
+              <a:t>1</a:t>
+            </a:fld>
+            <a:endParaRPr lang="es-ES"/>
+          </a:p>
+        </p:txBody>
+      </p:sp>
+    </p:spTree>
+    <p:extLst>
+      <p:ext uri="{BB962C8B-B14F-4D97-AF65-F5344CB8AC3E}">
+        <p14:creationId xmlns:p14="http://schemas.microsoft.com/office/powerpoint/2010/main" val="3041012700"/>
+      </p:ext>
+    </p:extLst>
+  </p:cSld>
+  <p:clrMapOvr>
+    <a:masterClrMapping/>
+  </p:clrMapOvr>
+</p:notes>
+</file>
+
 <file path=ppt/slideLayouts/slideLayout1.xml><?xml version="1.0" encoding="utf-8"?>
 <p:sldLayout xmlns:a="http://schemas.openxmlformats.org/drawingml/2006/main" xmlns:r="http://schemas.openxmlformats.org/officeDocument/2006/relationships" xmlns:p="http://schemas.openxmlformats.org/presentationml/2006/main" type="title" preserve="1">
   <p:cSld name="Diapositiva de título">
@@ -315,7 +756,7 @@
           <a:p>
             <a:fld id="{D342C332-2D02-4700-832E-F7AF3375AF8A}" type="datetimeFigureOut">
               <a:rPr lang="es-ES" smtClean="0"/>
-              <a:t>18/03/2026</a:t>
+              <a:t>23/03/2026</a:t>
             </a:fld>
             <a:endParaRPr lang="es-ES" dirty="0"/>
           </a:p>
@@ -513,7 +954,7 @@
           <a:p>
             <a:fld id="{D342C332-2D02-4700-832E-F7AF3375AF8A}" type="datetimeFigureOut">
               <a:rPr lang="es-ES" smtClean="0"/>
-              <a:t>18/03/2026</a:t>
+              <a:t>23/03/2026</a:t>
             </a:fld>
             <a:endParaRPr lang="es-ES" dirty="0"/>
           </a:p>
@@ -721,7 +1162,7 @@
           <a:p>
             <a:fld id="{D342C332-2D02-4700-832E-F7AF3375AF8A}" type="datetimeFigureOut">
               <a:rPr lang="es-ES" smtClean="0"/>
-              <a:t>18/03/2026</a:t>
+              <a:t>23/03/2026</a:t>
             </a:fld>
             <a:endParaRPr lang="es-ES" dirty="0"/>
           </a:p>
@@ -919,7 +1360,7 @@
           <a:p>
             <a:fld id="{D342C332-2D02-4700-832E-F7AF3375AF8A}" type="datetimeFigureOut">
               <a:rPr lang="es-ES" smtClean="0"/>
-              <a:t>18/03/2026</a:t>
+              <a:t>23/03/2026</a:t>
             </a:fld>
             <a:endParaRPr lang="es-ES" dirty="0"/>
           </a:p>
@@ -1194,7 +1635,7 @@
           <a:p>
             <a:fld id="{D342C332-2D02-4700-832E-F7AF3375AF8A}" type="datetimeFigureOut">
               <a:rPr lang="es-ES" smtClean="0"/>
-              <a:t>18/03/2026</a:t>
+              <a:t>23/03/2026</a:t>
             </a:fld>
             <a:endParaRPr lang="es-ES" dirty="0"/>
           </a:p>
@@ -1459,7 +1900,7 @@
           <a:p>
             <a:fld id="{D342C332-2D02-4700-832E-F7AF3375AF8A}" type="datetimeFigureOut">
               <a:rPr lang="es-ES" smtClean="0"/>
-              <a:t>18/03/2026</a:t>
+              <a:t>23/03/2026</a:t>
             </a:fld>
             <a:endParaRPr lang="es-ES" dirty="0"/>
           </a:p>
@@ -1871,7 +2312,7 @@
           <a:p>
             <a:fld id="{D342C332-2D02-4700-832E-F7AF3375AF8A}" type="datetimeFigureOut">
               <a:rPr lang="es-ES" smtClean="0"/>
-              <a:t>18/03/2026</a:t>
+              <a:t>23/03/2026</a:t>
             </a:fld>
             <a:endParaRPr lang="es-ES" dirty="0"/>
           </a:p>
@@ -2012,7 +2453,7 @@
           <a:p>
             <a:fld id="{D342C332-2D02-4700-832E-F7AF3375AF8A}" type="datetimeFigureOut">
               <a:rPr lang="es-ES" smtClean="0"/>
-              <a:t>18/03/2026</a:t>
+              <a:t>23/03/2026</a:t>
             </a:fld>
             <a:endParaRPr lang="es-ES" dirty="0"/>
           </a:p>
@@ -2125,7 +2566,7 @@
           <a:p>
             <a:fld id="{D342C332-2D02-4700-832E-F7AF3375AF8A}" type="datetimeFigureOut">
               <a:rPr lang="es-ES" smtClean="0"/>
-              <a:t>18/03/2026</a:t>
+              <a:t>23/03/2026</a:t>
             </a:fld>
             <a:endParaRPr lang="es-ES" dirty="0"/>
           </a:p>
@@ -2436,7 +2877,7 @@
           <a:p>
             <a:fld id="{D342C332-2D02-4700-832E-F7AF3375AF8A}" type="datetimeFigureOut">
               <a:rPr lang="es-ES" smtClean="0"/>
-              <a:t>18/03/2026</a:t>
+              <a:t>23/03/2026</a:t>
             </a:fld>
             <a:endParaRPr lang="es-ES" dirty="0"/>
           </a:p>
@@ -2724,7 +3165,7 @@
           <a:p>
             <a:fld id="{D342C332-2D02-4700-832E-F7AF3375AF8A}" type="datetimeFigureOut">
               <a:rPr lang="es-ES" smtClean="0"/>
-              <a:t>18/03/2026</a:t>
+              <a:t>23/03/2026</a:t>
             </a:fld>
             <a:endParaRPr lang="es-ES" dirty="0"/>
           </a:p>
@@ -2965,7 +3406,7 @@
           <a:p>
             <a:fld id="{D342C332-2D02-4700-832E-F7AF3375AF8A}" type="datetimeFigureOut">
               <a:rPr lang="es-ES" smtClean="0"/>
-              <a:t>18/03/2026</a:t>
+              <a:t>23/03/2026</a:t>
             </a:fld>
             <a:endParaRPr lang="es-ES" dirty="0"/>
           </a:p>
@@ -3551,8 +3992,8 @@
         </p:nvSpPr>
         <p:spPr>
           <a:xfrm>
-            <a:off x="3980528" y="1390844"/>
-            <a:ext cx="3559628" cy="659144"/>
+            <a:off x="3980528" y="1282150"/>
+            <a:ext cx="3559628" cy="777810"/>
           </a:xfrm>
           <a:prstGeom prst="rect">
             <a:avLst/>
@@ -3599,7 +4040,7 @@
         <p:spPr>
           <a:xfrm>
             <a:off x="4273587" y="2293708"/>
-            <a:ext cx="1410179" cy="1097280"/>
+            <a:ext cx="3161627" cy="741120"/>
           </a:xfrm>
           <a:prstGeom prst="rect">
             <a:avLst/>
@@ -3626,7 +4067,7 @@
             <a:pPr algn="ctr"/>
             <a:r>
               <a:rPr lang="es-ES" dirty="0"/>
-              <a:t>Gestion de Eventos </a:t>
+              <a:t>Eventos </a:t>
             </a:r>
           </a:p>
           <a:p>
@@ -3640,10 +4081,10 @@
       </p:sp>
       <p:sp>
         <p:nvSpPr>
-          <p:cNvPr id="10" name="Rectángulo 9">
-            <a:extLst>
-              <a:ext uri="{FF2B5EF4-FFF2-40B4-BE49-F238E27FC236}">
-                <a16:creationId xmlns:a16="http://schemas.microsoft.com/office/drawing/2014/main" id="{D5B8D8DA-D9B9-E6B3-426F-DFF166B1B6F4}"/>
+          <p:cNvPr id="11" name="Rectángulo 10">
+            <a:extLst>
+              <a:ext uri="{FF2B5EF4-FFF2-40B4-BE49-F238E27FC236}">
+                <a16:creationId xmlns:a16="http://schemas.microsoft.com/office/drawing/2014/main" id="{FF670853-5998-47FF-BD9E-8C8685261456}"/>
               </a:ext>
             </a:extLst>
           </p:cNvPr>
@@ -3652,8 +4093,102 @@
         </p:nvSpPr>
         <p:spPr>
           <a:xfrm>
-            <a:off x="6336027" y="2327507"/>
-            <a:ext cx="1410179" cy="1097280"/>
+            <a:off x="4216670" y="3168365"/>
+            <a:ext cx="1828800" cy="1034508"/>
+          </a:xfrm>
+          <a:prstGeom prst="rect">
+            <a:avLst/>
+          </a:prstGeom>
+        </p:spPr>
+        <p:style>
+          <a:lnRef idx="2">
+            <a:schemeClr val="accent4"/>
+          </a:lnRef>
+          <a:fillRef idx="1">
+            <a:schemeClr val="lt1"/>
+          </a:fillRef>
+          <a:effectRef idx="0">
+            <a:schemeClr val="accent4"/>
+          </a:effectRef>
+          <a:fontRef idx="minor">
+            <a:schemeClr val="dk1"/>
+          </a:fontRef>
+        </p:style>
+        <p:txBody>
+          <a:bodyPr rtlCol="0" anchor="ctr"/>
+          <a:lstStyle/>
+          <a:p>
+            <a:pPr algn="ctr"/>
+            <a:r>
+              <a:rPr lang="es-ES" dirty="0"/>
+              <a:t>Gestión de la Actividad ( Evento)</a:t>
+            </a:r>
+          </a:p>
+        </p:txBody>
+      </p:sp>
+      <p:sp>
+        <p:nvSpPr>
+          <p:cNvPr id="14" name="Rectángulo 13">
+            <a:extLst>
+              <a:ext uri="{FF2B5EF4-FFF2-40B4-BE49-F238E27FC236}">
+                <a16:creationId xmlns:a16="http://schemas.microsoft.com/office/drawing/2014/main" id="{2C82F611-A8E1-6431-0ED4-333901433924}"/>
+              </a:ext>
+            </a:extLst>
+          </p:cNvPr>
+          <p:cNvSpPr/>
+          <p:nvPr/>
+        </p:nvSpPr>
+        <p:spPr>
+          <a:xfrm>
+            <a:off x="4233640" y="4314200"/>
+            <a:ext cx="1828800" cy="659144"/>
+          </a:xfrm>
+          <a:prstGeom prst="rect">
+            <a:avLst/>
+          </a:prstGeom>
+        </p:spPr>
+        <p:style>
+          <a:lnRef idx="2">
+            <a:schemeClr val="accent4"/>
+          </a:lnRef>
+          <a:fillRef idx="1">
+            <a:schemeClr val="lt1"/>
+          </a:fillRef>
+          <a:effectRef idx="0">
+            <a:schemeClr val="accent4"/>
+          </a:effectRef>
+          <a:fontRef idx="minor">
+            <a:schemeClr val="dk1"/>
+          </a:fontRef>
+        </p:style>
+        <p:txBody>
+          <a:bodyPr rtlCol="0" anchor="ctr"/>
+          <a:lstStyle/>
+          <a:p>
+            <a:pPr algn="ctr"/>
+            <a:r>
+              <a:rPr lang="es-ES" dirty="0"/>
+              <a:t>Gestión Activos </a:t>
+            </a:r>
+          </a:p>
+        </p:txBody>
+      </p:sp>
+      <p:sp>
+        <p:nvSpPr>
+          <p:cNvPr id="15" name="Rectángulo 14">
+            <a:extLst>
+              <a:ext uri="{FF2B5EF4-FFF2-40B4-BE49-F238E27FC236}">
+                <a16:creationId xmlns:a16="http://schemas.microsoft.com/office/drawing/2014/main" id="{9E73F907-14EA-41F3-8B02-7C3532EF8577}"/>
+              </a:ext>
+            </a:extLst>
+          </p:cNvPr>
+          <p:cNvSpPr/>
+          <p:nvPr/>
+        </p:nvSpPr>
+        <p:spPr>
+          <a:xfrm>
+            <a:off x="8140283" y="1305977"/>
+            <a:ext cx="2050395" cy="777810"/>
           </a:xfrm>
           <a:prstGeom prst="rect">
             <a:avLst/>
@@ -3680,17 +4215,17 @@
             <a:pPr algn="ctr"/>
             <a:r>
               <a:rPr lang="es-ES" dirty="0"/>
-              <a:t>Contenidos</a:t>
-            </a:r>
-          </a:p>
-        </p:txBody>
-      </p:sp>
-      <p:sp>
-        <p:nvSpPr>
-          <p:cNvPr id="11" name="Rectángulo 10">
-            <a:extLst>
-              <a:ext uri="{FF2B5EF4-FFF2-40B4-BE49-F238E27FC236}">
-                <a16:creationId xmlns:a16="http://schemas.microsoft.com/office/drawing/2014/main" id="{FF670853-5998-47FF-BD9E-8C8685261456}"/>
+              <a:t>Sistema de Gestión Diáspora</a:t>
+            </a:r>
+          </a:p>
+        </p:txBody>
+      </p:sp>
+      <p:sp>
+        <p:nvSpPr>
+          <p:cNvPr id="16" name="Rectángulo 15">
+            <a:extLst>
+              <a:ext uri="{FF2B5EF4-FFF2-40B4-BE49-F238E27FC236}">
+                <a16:creationId xmlns:a16="http://schemas.microsoft.com/office/drawing/2014/main" id="{41613C73-00E8-6A72-7567-F429A0951D12}"/>
               </a:ext>
             </a:extLst>
           </p:cNvPr>
@@ -3699,149 +4234,8 @@
         </p:nvSpPr>
         <p:spPr>
           <a:xfrm>
-            <a:off x="4216670" y="3543729"/>
-            <a:ext cx="1828800" cy="659144"/>
-          </a:xfrm>
-          <a:prstGeom prst="rect">
-            <a:avLst/>
-          </a:prstGeom>
-        </p:spPr>
-        <p:style>
-          <a:lnRef idx="2">
-            <a:schemeClr val="accent4"/>
-          </a:lnRef>
-          <a:fillRef idx="1">
-            <a:schemeClr val="lt1"/>
-          </a:fillRef>
-          <a:effectRef idx="0">
-            <a:schemeClr val="accent4"/>
-          </a:effectRef>
-          <a:fontRef idx="minor">
-            <a:schemeClr val="dk1"/>
-          </a:fontRef>
-        </p:style>
-        <p:txBody>
-          <a:bodyPr rtlCol="0" anchor="ctr"/>
-          <a:lstStyle/>
-          <a:p>
-            <a:pPr algn="ctr"/>
-            <a:r>
-              <a:rPr lang="es-ES" dirty="0"/>
-              <a:t>Gestión de la Actividad ( Evento)</a:t>
-            </a:r>
-          </a:p>
-        </p:txBody>
-      </p:sp>
-      <p:sp>
-        <p:nvSpPr>
-          <p:cNvPr id="14" name="Rectángulo 13">
-            <a:extLst>
-              <a:ext uri="{FF2B5EF4-FFF2-40B4-BE49-F238E27FC236}">
-                <a16:creationId xmlns:a16="http://schemas.microsoft.com/office/drawing/2014/main" id="{2C82F611-A8E1-6431-0ED4-333901433924}"/>
-              </a:ext>
-            </a:extLst>
-          </p:cNvPr>
-          <p:cNvSpPr/>
-          <p:nvPr/>
-        </p:nvSpPr>
-        <p:spPr>
-          <a:xfrm>
-            <a:off x="4233640" y="4314200"/>
-            <a:ext cx="1828800" cy="659144"/>
-          </a:xfrm>
-          <a:prstGeom prst="rect">
-            <a:avLst/>
-          </a:prstGeom>
-        </p:spPr>
-        <p:style>
-          <a:lnRef idx="2">
-            <a:schemeClr val="accent4"/>
-          </a:lnRef>
-          <a:fillRef idx="1">
-            <a:schemeClr val="lt1"/>
-          </a:fillRef>
-          <a:effectRef idx="0">
-            <a:schemeClr val="accent4"/>
-          </a:effectRef>
-          <a:fontRef idx="minor">
-            <a:schemeClr val="dk1"/>
-          </a:fontRef>
-        </p:style>
-        <p:txBody>
-          <a:bodyPr rtlCol="0" anchor="ctr"/>
-          <a:lstStyle/>
-          <a:p>
-            <a:pPr algn="ctr"/>
-            <a:r>
-              <a:rPr lang="es-ES" dirty="0"/>
-              <a:t>Gestión Activos </a:t>
-            </a:r>
-          </a:p>
-        </p:txBody>
-      </p:sp>
-      <p:sp>
-        <p:nvSpPr>
-          <p:cNvPr id="15" name="Rectángulo 14">
-            <a:extLst>
-              <a:ext uri="{FF2B5EF4-FFF2-40B4-BE49-F238E27FC236}">
-                <a16:creationId xmlns:a16="http://schemas.microsoft.com/office/drawing/2014/main" id="{9E73F907-14EA-41F3-8B02-7C3532EF8577}"/>
-              </a:ext>
-            </a:extLst>
-          </p:cNvPr>
-          <p:cNvSpPr/>
-          <p:nvPr/>
-        </p:nvSpPr>
-        <p:spPr>
-          <a:xfrm>
-            <a:off x="8140283" y="1424643"/>
-            <a:ext cx="2050395" cy="659144"/>
-          </a:xfrm>
-          <a:prstGeom prst="rect">
-            <a:avLst/>
-          </a:prstGeom>
-        </p:spPr>
-        <p:style>
-          <a:lnRef idx="2">
-            <a:schemeClr val="accent6"/>
-          </a:lnRef>
-          <a:fillRef idx="1">
-            <a:schemeClr val="lt1"/>
-          </a:fillRef>
-          <a:effectRef idx="0">
-            <a:schemeClr val="accent6"/>
-          </a:effectRef>
-          <a:fontRef idx="minor">
-            <a:schemeClr val="dk1"/>
-          </a:fontRef>
-        </p:style>
-        <p:txBody>
-          <a:bodyPr rtlCol="0" anchor="ctr"/>
-          <a:lstStyle/>
-          <a:p>
-            <a:pPr algn="ctr"/>
-            <a:r>
-              <a:rPr lang="es-ES" dirty="0"/>
-              <a:t>Sistema de Gestión Diáspora</a:t>
-            </a:r>
-          </a:p>
-        </p:txBody>
-      </p:sp>
-      <p:sp>
-        <p:nvSpPr>
-          <p:cNvPr id="16" name="Rectángulo 15">
-            <a:extLst>
-              <a:ext uri="{FF2B5EF4-FFF2-40B4-BE49-F238E27FC236}">
-                <a16:creationId xmlns:a16="http://schemas.microsoft.com/office/drawing/2014/main" id="{41613C73-00E8-6A72-7567-F429A0951D12}"/>
-              </a:ext>
-            </a:extLst>
-          </p:cNvPr>
-          <p:cNvSpPr/>
-          <p:nvPr/>
-        </p:nvSpPr>
-        <p:spPr>
-          <a:xfrm>
-            <a:off x="228600" y="5973417"/>
-            <a:ext cx="2037522" cy="596348"/>
+            <a:off x="1372104" y="6129009"/>
+            <a:ext cx="1653649" cy="369332"/>
           </a:xfrm>
           <a:prstGeom prst="rect">
             <a:avLst/>
@@ -3889,8 +4283,8 @@
         </p:nvSpPr>
         <p:spPr>
           <a:xfrm>
-            <a:off x="4681330" y="5973417"/>
-            <a:ext cx="2037522" cy="596348"/>
+            <a:off x="5440962" y="6129009"/>
+            <a:ext cx="2037522" cy="369332"/>
           </a:xfrm>
           <a:prstGeom prst="rect">
             <a:avLst/>
@@ -3938,8 +4332,8 @@
         </p:nvSpPr>
         <p:spPr>
           <a:xfrm>
-            <a:off x="7051529" y="5973417"/>
-            <a:ext cx="2037522" cy="596348"/>
+            <a:off x="7811161" y="6129009"/>
+            <a:ext cx="2037522" cy="369332"/>
           </a:xfrm>
           <a:prstGeom prst="rect">
             <a:avLst/>
@@ -3987,8 +4381,8 @@
         </p:nvSpPr>
         <p:spPr>
           <a:xfrm>
-            <a:off x="9291347" y="5973417"/>
-            <a:ext cx="2037522" cy="596348"/>
+            <a:off x="10050979" y="6129009"/>
+            <a:ext cx="2037522" cy="369332"/>
           </a:xfrm>
           <a:prstGeom prst="rect">
             <a:avLst/>
@@ -4037,7 +4431,7 @@
         <p:spPr>
           <a:xfrm>
             <a:off x="2053957" y="3168365"/>
-            <a:ext cx="1828800" cy="659144"/>
+            <a:ext cx="1828800" cy="922692"/>
           </a:xfrm>
           <a:prstGeom prst="rect">
             <a:avLst/>
@@ -4064,7 +4458,7 @@
             <a:pPr algn="ctr"/>
             <a:r>
               <a:rPr lang="es-ES" dirty="0"/>
-              <a:t>Programas  / Planes </a:t>
+              <a:t>Programas  / Planes / proyectos</a:t>
             </a:r>
           </a:p>
         </p:txBody>
@@ -4083,8 +4477,8 @@
         </p:nvSpPr>
         <p:spPr>
           <a:xfrm>
-            <a:off x="2477470" y="5973417"/>
-            <a:ext cx="2037522" cy="596348"/>
+            <a:off x="3237102" y="6129009"/>
+            <a:ext cx="2037522" cy="369332"/>
           </a:xfrm>
           <a:prstGeom prst="rect">
             <a:avLst/>
@@ -4240,7 +4634,7 @@
         </p:nvSpPr>
         <p:spPr>
           <a:xfrm>
-            <a:off x="2053957" y="3932065"/>
+            <a:off x="2083998" y="4101570"/>
             <a:ext cx="1828800" cy="659144"/>
           </a:xfrm>
           <a:prstGeom prst="rect">
@@ -4385,7 +4779,7 @@
         </p:nvSpPr>
         <p:spPr>
           <a:xfrm>
-            <a:off x="3138358" y="5385285"/>
+            <a:off x="3121008" y="5598721"/>
             <a:ext cx="1317686" cy="320040"/>
           </a:xfrm>
           <a:prstGeom prst="rect">
@@ -4434,7 +4828,7 @@
         </p:nvSpPr>
         <p:spPr>
           <a:xfrm>
-            <a:off x="2053957" y="4658490"/>
+            <a:off x="2053957" y="4887014"/>
             <a:ext cx="1828800" cy="659144"/>
           </a:xfrm>
           <a:prstGeom prst="rect">
@@ -4544,7 +4938,7 @@
         <p:spPr>
           <a:xfrm>
             <a:off x="8342579" y="2327507"/>
-            <a:ext cx="1410179" cy="1097280"/>
+            <a:ext cx="1410179" cy="733593"/>
           </a:xfrm>
           <a:prstGeom prst="rect">
             <a:avLst/>
@@ -4571,7 +4965,7 @@
             <a:pPr algn="ctr"/>
             <a:r>
               <a:rPr lang="es-ES" dirty="0"/>
-              <a:t>Portal de la Diáspora </a:t>
+              <a:t>Diáspora </a:t>
             </a:r>
           </a:p>
         </p:txBody>
@@ -4728,8 +5122,8 @@
         </p:nvSpPr>
         <p:spPr>
           <a:xfrm>
-            <a:off x="6200894" y="3543729"/>
-            <a:ext cx="1828800" cy="1396836"/>
+            <a:off x="6200894" y="3168365"/>
+            <a:ext cx="1828800" cy="1772200"/>
           </a:xfrm>
           <a:prstGeom prst="rect">
             <a:avLst/>
@@ -4923,7 +5317,7 @@
           <p:nvPr/>
         </p:nvPicPr>
         <p:blipFill>
-          <a:blip r:embed="rId2">
+          <a:blip r:embed="rId3">
             <a:extLst>
               <a:ext uri="{28A0092B-C50C-407E-A947-70E740481C1C}">
                 <a14:useLocalDpi xmlns:a14="http://schemas.microsoft.com/office/drawing/2010/main" val="0"/>
@@ -4970,7 +5364,7 @@
           <p:nvPr/>
         </p:nvPicPr>
         <p:blipFill>
-          <a:blip r:embed="rId3"/>
+          <a:blip r:embed="rId4"/>
           <a:stretch>
             <a:fillRect/>
           </a:stretch>
@@ -5000,7 +5394,7 @@
           <p:nvPr/>
         </p:nvPicPr>
         <p:blipFill>
-          <a:blip r:embed="rId3"/>
+          <a:blip r:embed="rId4"/>
           <a:stretch>
             <a:fillRect/>
           </a:stretch>
@@ -5030,7 +5424,7 @@
           <p:nvPr/>
         </p:nvPicPr>
         <p:blipFill>
-          <a:blip r:embed="rId4">
+          <a:blip r:embed="rId5">
             <a:extLst>
               <a:ext uri="{28A0092B-C50C-407E-A947-70E740481C1C}">
                 <a14:useLocalDpi xmlns:a14="http://schemas.microsoft.com/office/drawing/2010/main" val="0"/>
@@ -5094,6 +5488,405 @@
               <a:rPr lang="es-ES" dirty="0"/>
               <a:t>Otros…</a:t>
             </a:r>
+          </a:p>
+        </p:txBody>
+      </p:sp>
+      <p:sp>
+        <p:nvSpPr>
+          <p:cNvPr id="2" name="Rectángulo 1">
+            <a:extLst>
+              <a:ext uri="{FF2B5EF4-FFF2-40B4-BE49-F238E27FC236}">
+                <a16:creationId xmlns:a16="http://schemas.microsoft.com/office/drawing/2014/main" id="{B95CF428-9D6E-661D-C063-C49BC84EF161}"/>
+              </a:ext>
+            </a:extLst>
+          </p:cNvPr>
+          <p:cNvSpPr/>
+          <p:nvPr/>
+        </p:nvSpPr>
+        <p:spPr>
+          <a:xfrm>
+            <a:off x="146910" y="6129009"/>
+            <a:ext cx="1058856" cy="369332"/>
+          </a:xfrm>
+          <a:prstGeom prst="rect">
+            <a:avLst/>
+          </a:prstGeom>
+        </p:spPr>
+        <p:style>
+          <a:lnRef idx="2">
+            <a:schemeClr val="accent1">
+              <a:shade val="15000"/>
+            </a:schemeClr>
+          </a:lnRef>
+          <a:fillRef idx="1">
+            <a:schemeClr val="accent1"/>
+          </a:fillRef>
+          <a:effectRef idx="0">
+            <a:schemeClr val="accent1"/>
+          </a:effectRef>
+          <a:fontRef idx="minor">
+            <a:schemeClr val="lt1"/>
+          </a:fontRef>
+        </p:style>
+        <p:txBody>
+          <a:bodyPr rtlCol="0" anchor="ctr"/>
+          <a:lstStyle/>
+          <a:p>
+            <a:pPr algn="ctr"/>
+            <a:r>
+              <a:rPr lang="es-ES" dirty="0" err="1"/>
+              <a:t>Login</a:t>
+            </a:r>
+            <a:endParaRPr lang="es-ES" dirty="0"/>
+          </a:p>
+        </p:txBody>
+      </p:sp>
+      <p:cxnSp>
+        <p:nvCxnSpPr>
+          <p:cNvPr id="6" name="Conector recto de flecha 5">
+            <a:extLst>
+              <a:ext uri="{FF2B5EF4-FFF2-40B4-BE49-F238E27FC236}">
+                <a16:creationId xmlns:a16="http://schemas.microsoft.com/office/drawing/2014/main" id="{FF06945E-2301-E366-001A-FB19BB9C1F7E}"/>
+              </a:ext>
+            </a:extLst>
+          </p:cNvPr>
+          <p:cNvCxnSpPr/>
+          <p:nvPr/>
+        </p:nvCxnSpPr>
+        <p:spPr>
+          <a:xfrm>
+            <a:off x="4572000" y="3931527"/>
+            <a:ext cx="0" cy="659682"/>
+          </a:xfrm>
+          <a:prstGeom prst="straightConnector1">
+            <a:avLst/>
+          </a:prstGeom>
+          <a:ln>
+            <a:tailEnd type="triangle"/>
+          </a:ln>
+        </p:spPr>
+        <p:style>
+          <a:lnRef idx="2">
+            <a:schemeClr val="accent1"/>
+          </a:lnRef>
+          <a:fillRef idx="0">
+            <a:schemeClr val="accent1"/>
+          </a:fillRef>
+          <a:effectRef idx="1">
+            <a:schemeClr val="accent1"/>
+          </a:effectRef>
+          <a:fontRef idx="minor">
+            <a:schemeClr val="tx1"/>
+          </a:fontRef>
+        </p:style>
+      </p:cxnSp>
+      <p:cxnSp>
+        <p:nvCxnSpPr>
+          <p:cNvPr id="13" name="Conector recto de flecha 12">
+            <a:extLst>
+              <a:ext uri="{FF2B5EF4-FFF2-40B4-BE49-F238E27FC236}">
+                <a16:creationId xmlns:a16="http://schemas.microsoft.com/office/drawing/2014/main" id="{C9B6FEAA-5D67-4B73-023C-DF98FEA7AE92}"/>
+              </a:ext>
+            </a:extLst>
+          </p:cNvPr>
+          <p:cNvCxnSpPr/>
+          <p:nvPr/>
+        </p:nvCxnSpPr>
+        <p:spPr>
+          <a:xfrm>
+            <a:off x="5796366" y="4091553"/>
+            <a:ext cx="390074" cy="0"/>
+          </a:xfrm>
+          <a:prstGeom prst="straightConnector1">
+            <a:avLst/>
+          </a:prstGeom>
+          <a:ln>
+            <a:tailEnd type="triangle"/>
+          </a:ln>
+        </p:spPr>
+        <p:style>
+          <a:lnRef idx="2">
+            <a:schemeClr val="accent1"/>
+          </a:lnRef>
+          <a:fillRef idx="0">
+            <a:schemeClr val="accent1"/>
+          </a:fillRef>
+          <a:effectRef idx="1">
+            <a:schemeClr val="accent1"/>
+          </a:effectRef>
+          <a:fontRef idx="minor">
+            <a:schemeClr val="tx1"/>
+          </a:fontRef>
+        </p:style>
+      </p:cxnSp>
+      <p:cxnSp>
+        <p:nvCxnSpPr>
+          <p:cNvPr id="17" name="Conector recto de flecha 16">
+            <a:extLst>
+              <a:ext uri="{FF2B5EF4-FFF2-40B4-BE49-F238E27FC236}">
+                <a16:creationId xmlns:a16="http://schemas.microsoft.com/office/drawing/2014/main" id="{CF7297A1-40F5-B28E-5A72-00B2F252AA61}"/>
+              </a:ext>
+            </a:extLst>
+          </p:cNvPr>
+          <p:cNvCxnSpPr/>
+          <p:nvPr/>
+        </p:nvCxnSpPr>
+        <p:spPr>
+          <a:xfrm>
+            <a:off x="5810820" y="4770895"/>
+            <a:ext cx="390074" cy="0"/>
+          </a:xfrm>
+          <a:prstGeom prst="straightConnector1">
+            <a:avLst/>
+          </a:prstGeom>
+          <a:ln>
+            <a:tailEnd type="triangle"/>
+          </a:ln>
+        </p:spPr>
+        <p:style>
+          <a:lnRef idx="2">
+            <a:schemeClr val="accent1"/>
+          </a:lnRef>
+          <a:fillRef idx="0">
+            <a:schemeClr val="accent1"/>
+          </a:fillRef>
+          <a:effectRef idx="1">
+            <a:schemeClr val="accent1"/>
+          </a:effectRef>
+          <a:fontRef idx="minor">
+            <a:schemeClr val="tx1"/>
+          </a:fontRef>
+        </p:style>
+      </p:cxnSp>
+      <p:sp>
+        <p:nvSpPr>
+          <p:cNvPr id="32" name="Elipse 31">
+            <a:extLst>
+              <a:ext uri="{FF2B5EF4-FFF2-40B4-BE49-F238E27FC236}">
+                <a16:creationId xmlns:a16="http://schemas.microsoft.com/office/drawing/2014/main" id="{6C767E23-356B-0A8A-DD75-29EB8100629E}"/>
+              </a:ext>
+            </a:extLst>
+          </p:cNvPr>
+          <p:cNvSpPr/>
+          <p:nvPr/>
+        </p:nvSpPr>
+        <p:spPr>
+          <a:xfrm>
+            <a:off x="7272750" y="1725568"/>
+            <a:ext cx="447260" cy="484656"/>
+          </a:xfrm>
+          <a:prstGeom prst="ellipse">
+            <a:avLst/>
+          </a:prstGeom>
+          <a:solidFill>
+            <a:srgbClr val="FFC000"/>
+          </a:solidFill>
+        </p:spPr>
+        <p:style>
+          <a:lnRef idx="2">
+            <a:schemeClr val="accent1">
+              <a:shade val="15000"/>
+            </a:schemeClr>
+          </a:lnRef>
+          <a:fillRef idx="1">
+            <a:schemeClr val="accent1"/>
+          </a:fillRef>
+          <a:effectRef idx="0">
+            <a:schemeClr val="accent1"/>
+          </a:effectRef>
+          <a:fontRef idx="minor">
+            <a:schemeClr val="lt1"/>
+          </a:fontRef>
+        </p:style>
+        <p:txBody>
+          <a:bodyPr rtlCol="0" anchor="ctr"/>
+          <a:lstStyle/>
+          <a:p>
+            <a:pPr algn="ctr"/>
+            <a:endParaRPr lang="es-ES"/>
+          </a:p>
+        </p:txBody>
+      </p:sp>
+      <p:sp>
+        <p:nvSpPr>
+          <p:cNvPr id="36" name="Elipse 35">
+            <a:extLst>
+              <a:ext uri="{FF2B5EF4-FFF2-40B4-BE49-F238E27FC236}">
+                <a16:creationId xmlns:a16="http://schemas.microsoft.com/office/drawing/2014/main" id="{978CA400-30E9-1E51-63C6-4A2592782D70}"/>
+              </a:ext>
+            </a:extLst>
+          </p:cNvPr>
+          <p:cNvSpPr/>
+          <p:nvPr/>
+        </p:nvSpPr>
+        <p:spPr>
+          <a:xfrm>
+            <a:off x="10090170" y="117331"/>
+            <a:ext cx="447260" cy="484656"/>
+          </a:xfrm>
+          <a:prstGeom prst="ellipse">
+            <a:avLst/>
+          </a:prstGeom>
+          <a:solidFill>
+            <a:srgbClr val="FFC000"/>
+          </a:solidFill>
+        </p:spPr>
+        <p:style>
+          <a:lnRef idx="2">
+            <a:schemeClr val="accent1">
+              <a:shade val="15000"/>
+            </a:schemeClr>
+          </a:lnRef>
+          <a:fillRef idx="1">
+            <a:schemeClr val="accent1"/>
+          </a:fillRef>
+          <a:effectRef idx="0">
+            <a:schemeClr val="accent1"/>
+          </a:effectRef>
+          <a:fontRef idx="minor">
+            <a:schemeClr val="lt1"/>
+          </a:fontRef>
+        </p:style>
+        <p:txBody>
+          <a:bodyPr rtlCol="0" anchor="ctr"/>
+          <a:lstStyle/>
+          <a:p>
+            <a:pPr algn="ctr"/>
+            <a:endParaRPr lang="es-ES"/>
+          </a:p>
+        </p:txBody>
+      </p:sp>
+      <p:sp>
+        <p:nvSpPr>
+          <p:cNvPr id="37" name="CuadroTexto 36">
+            <a:extLst>
+              <a:ext uri="{FF2B5EF4-FFF2-40B4-BE49-F238E27FC236}">
+                <a16:creationId xmlns:a16="http://schemas.microsoft.com/office/drawing/2014/main" id="{494FA63E-FDA4-BF39-539C-B3A4B88A5107}"/>
+              </a:ext>
+            </a:extLst>
+          </p:cNvPr>
+          <p:cNvSpPr txBox="1"/>
+          <p:nvPr/>
+        </p:nvSpPr>
+        <p:spPr>
+          <a:xfrm>
+            <a:off x="10652783" y="184898"/>
+            <a:ext cx="1723645" cy="369332"/>
+          </a:xfrm>
+          <a:prstGeom prst="rect">
+            <a:avLst/>
+          </a:prstGeom>
+          <a:noFill/>
+        </p:spPr>
+        <p:txBody>
+          <a:bodyPr wrap="square" rtlCol="0">
+            <a:spAutoFit/>
+          </a:bodyPr>
+          <a:lstStyle/>
+          <a:p>
+            <a:r>
+              <a:rPr lang="es-ES" dirty="0" err="1"/>
+              <a:t>Personalité</a:t>
+            </a:r>
+            <a:endParaRPr lang="es-ES" dirty="0"/>
+          </a:p>
+        </p:txBody>
+      </p:sp>
+      <p:sp>
+        <p:nvSpPr>
+          <p:cNvPr id="41" name="Elipse 40">
+            <a:extLst>
+              <a:ext uri="{FF2B5EF4-FFF2-40B4-BE49-F238E27FC236}">
+                <a16:creationId xmlns:a16="http://schemas.microsoft.com/office/drawing/2014/main" id="{68BAC5CC-6F7E-8DE9-456D-902C3A8E9671}"/>
+              </a:ext>
+            </a:extLst>
+          </p:cNvPr>
+          <p:cNvSpPr/>
+          <p:nvPr/>
+        </p:nvSpPr>
+        <p:spPr>
+          <a:xfrm>
+            <a:off x="3456835" y="1754215"/>
+            <a:ext cx="447260" cy="484656"/>
+          </a:xfrm>
+          <a:prstGeom prst="ellipse">
+            <a:avLst/>
+          </a:prstGeom>
+          <a:solidFill>
+            <a:srgbClr val="FFC000"/>
+          </a:solidFill>
+        </p:spPr>
+        <p:style>
+          <a:lnRef idx="2">
+            <a:schemeClr val="accent1">
+              <a:shade val="15000"/>
+            </a:schemeClr>
+          </a:lnRef>
+          <a:fillRef idx="1">
+            <a:schemeClr val="accent1"/>
+          </a:fillRef>
+          <a:effectRef idx="0">
+            <a:schemeClr val="accent1"/>
+          </a:effectRef>
+          <a:fontRef idx="minor">
+            <a:schemeClr val="lt1"/>
+          </a:fontRef>
+        </p:style>
+        <p:txBody>
+          <a:bodyPr rtlCol="0" anchor="ctr"/>
+          <a:lstStyle/>
+          <a:p>
+            <a:pPr algn="ctr"/>
+            <a:endParaRPr lang="es-ES"/>
+          </a:p>
+        </p:txBody>
+      </p:sp>
+      <p:sp>
+        <p:nvSpPr>
+          <p:cNvPr id="43" name="Elipse 42">
+            <a:extLst>
+              <a:ext uri="{FF2B5EF4-FFF2-40B4-BE49-F238E27FC236}">
+                <a16:creationId xmlns:a16="http://schemas.microsoft.com/office/drawing/2014/main" id="{A03F6CAD-6AFD-F3FA-CA2D-B9609981813C}"/>
+              </a:ext>
+            </a:extLst>
+          </p:cNvPr>
+          <p:cNvSpPr/>
+          <p:nvPr/>
+        </p:nvSpPr>
+        <p:spPr>
+          <a:xfrm>
+            <a:off x="10090170" y="1720991"/>
+            <a:ext cx="447260" cy="484656"/>
+          </a:xfrm>
+          <a:prstGeom prst="ellipse">
+            <a:avLst/>
+          </a:prstGeom>
+          <a:solidFill>
+            <a:srgbClr val="FFC000"/>
+          </a:solidFill>
+        </p:spPr>
+        <p:style>
+          <a:lnRef idx="2">
+            <a:schemeClr val="accent1">
+              <a:shade val="15000"/>
+            </a:schemeClr>
+          </a:lnRef>
+          <a:fillRef idx="1">
+            <a:schemeClr val="accent1"/>
+          </a:fillRef>
+          <a:effectRef idx="0">
+            <a:schemeClr val="accent1"/>
+          </a:effectRef>
+          <a:fontRef idx="minor">
+            <a:schemeClr val="lt1"/>
+          </a:fontRef>
+        </p:style>
+        <p:txBody>
+          <a:bodyPr rtlCol="0" anchor="ctr"/>
+          <a:lstStyle/>
+          <a:p>
+            <a:pPr algn="ctr"/>
+            <a:endParaRPr lang="es-ES"/>
           </a:p>
         </p:txBody>
       </p:sp>
@@ -5425,7 +6218,342 @@
 </a:theme>
 </file>
 
+<file path=ppt/theme/theme2.xml><?xml version="1.0" encoding="utf-8"?>
+<a:theme xmlns:a="http://schemas.openxmlformats.org/drawingml/2006/main" name="Tema de Office">
+  <a:themeElements>
+    <a:clrScheme name="Office">
+      <a:dk1>
+        <a:sysClr val="windowText" lastClr="000000"/>
+      </a:dk1>
+      <a:lt1>
+        <a:sysClr val="window" lastClr="FFFFFF"/>
+      </a:lt1>
+      <a:dk2>
+        <a:srgbClr val="0E2841"/>
+      </a:dk2>
+      <a:lt2>
+        <a:srgbClr val="E8E8E8"/>
+      </a:lt2>
+      <a:accent1>
+        <a:srgbClr val="156082"/>
+      </a:accent1>
+      <a:accent2>
+        <a:srgbClr val="E97132"/>
+      </a:accent2>
+      <a:accent3>
+        <a:srgbClr val="196B24"/>
+      </a:accent3>
+      <a:accent4>
+        <a:srgbClr val="0F9ED5"/>
+      </a:accent4>
+      <a:accent5>
+        <a:srgbClr val="A02B93"/>
+      </a:accent5>
+      <a:accent6>
+        <a:srgbClr val="4EA72E"/>
+      </a:accent6>
+      <a:hlink>
+        <a:srgbClr val="467886"/>
+      </a:hlink>
+      <a:folHlink>
+        <a:srgbClr val="96607D"/>
+      </a:folHlink>
+    </a:clrScheme>
+    <a:fontScheme name="Office">
+      <a:majorFont>
+        <a:latin typeface="Aptos Display" panose="02110004020202020204"/>
+        <a:ea typeface=""/>
+        <a:cs typeface=""/>
+        <a:font script="Jpan" typeface="游ゴシック Light"/>
+        <a:font script="Hang" typeface="맑은 고딕"/>
+        <a:font script="Hans" typeface="等线 Light"/>
+        <a:font script="Hant" typeface="新細明體"/>
+        <a:font script="Arab" typeface="Times New Roman"/>
+        <a:font script="Hebr" typeface="Times New Roman"/>
+        <a:font script="Thai" typeface="Angsana New"/>
+        <a:font script="Ethi" typeface="Nyala"/>
+        <a:font script="Beng" typeface="Vrinda"/>
+        <a:font script="Gujr" typeface="Shruti"/>
+        <a:font script="Khmr" typeface="MoolBoran"/>
+        <a:font script="Knda" typeface="Tunga"/>
+        <a:font script="Guru" typeface="Raavi"/>
+        <a:font script="Cans" typeface="Euphemia"/>
+        <a:font script="Cher" typeface="Plantagenet Cherokee"/>
+        <a:font script="Yiii" typeface="Microsoft Yi Baiti"/>
+        <a:font script="Tibt" typeface="Microsoft Himalaya"/>
+        <a:font script="Thaa" typeface="MV Boli"/>
+        <a:font script="Deva" typeface="Mangal"/>
+        <a:font script="Telu" typeface="Gautami"/>
+        <a:font script="Taml" typeface="Latha"/>
+        <a:font script="Syrc" typeface="Estrangelo Edessa"/>
+        <a:font script="Orya" typeface="Kalinga"/>
+        <a:font script="Mlym" typeface="Kartika"/>
+        <a:font script="Laoo" typeface="DokChampa"/>
+        <a:font script="Sinh" typeface="Iskoola Pota"/>
+        <a:font script="Mong" typeface="Mongolian Baiti"/>
+        <a:font script="Viet" typeface="Times New Roman"/>
+        <a:font script="Uigh" typeface="Microsoft Uighur"/>
+        <a:font script="Geor" typeface="Sylfaen"/>
+        <a:font script="Armn" typeface="Arial"/>
+        <a:font script="Bugi" typeface="Leelawadee UI"/>
+        <a:font script="Bopo" typeface="Microsoft JhengHei"/>
+        <a:font script="Java" typeface="Javanese Text"/>
+        <a:font script="Lisu" typeface="Segoe UI"/>
+        <a:font script="Mymr" typeface="Myanmar Text"/>
+        <a:font script="Nkoo" typeface="Ebrima"/>
+        <a:font script="Olck" typeface="Nirmala UI"/>
+        <a:font script="Osma" typeface="Ebrima"/>
+        <a:font script="Phag" typeface="Phagspa"/>
+        <a:font script="Syrn" typeface="Estrangelo Edessa"/>
+        <a:font script="Syrj" typeface="Estrangelo Edessa"/>
+        <a:font script="Syre" typeface="Estrangelo Edessa"/>
+        <a:font script="Sora" typeface="Nirmala UI"/>
+        <a:font script="Tale" typeface="Microsoft Tai Le"/>
+        <a:font script="Talu" typeface="Microsoft New Tai Lue"/>
+        <a:font script="Tfng" typeface="Ebrima"/>
+      </a:majorFont>
+      <a:minorFont>
+        <a:latin typeface="Aptos" panose="02110004020202020204"/>
+        <a:ea typeface=""/>
+        <a:cs typeface=""/>
+        <a:font script="Jpan" typeface="游ゴシック"/>
+        <a:font script="Hang" typeface="맑은 고딕"/>
+        <a:font script="Hans" typeface="等线"/>
+        <a:font script="Hant" typeface="新細明體"/>
+        <a:font script="Arab" typeface="Arial"/>
+        <a:font script="Hebr" typeface="Arial"/>
+        <a:font script="Thai" typeface="Cordia New"/>
+        <a:font script="Ethi" typeface="Nyala"/>
+        <a:font script="Beng" typeface="Vrinda"/>
+        <a:font script="Gujr" typeface="Shruti"/>
+        <a:font script="Khmr" typeface="DaunPenh"/>
+        <a:font script="Knda" typeface="Tunga"/>
+        <a:font script="Guru" typeface="Raavi"/>
+        <a:font script="Cans" typeface="Euphemia"/>
+        <a:font script="Cher" typeface="Plantagenet Cherokee"/>
+        <a:font script="Yiii" typeface="Microsoft Yi Baiti"/>
+        <a:font script="Tibt" typeface="Microsoft Himalaya"/>
+        <a:font script="Thaa" typeface="MV Boli"/>
+        <a:font script="Deva" typeface="Mangal"/>
+        <a:font script="Telu" typeface="Gautami"/>
+        <a:font script="Taml" typeface="Latha"/>
+        <a:font script="Syrc" typeface="Estrangelo Edessa"/>
+        <a:font script="Orya" typeface="Kalinga"/>
+        <a:font script="Mlym" typeface="Kartika"/>
+        <a:font script="Laoo" typeface="DokChampa"/>
+        <a:font script="Sinh" typeface="Iskoola Pota"/>
+        <a:font script="Mong" typeface="Mongolian Baiti"/>
+        <a:font script="Viet" typeface="Arial"/>
+        <a:font script="Uigh" typeface="Microsoft Uighur"/>
+        <a:font script="Geor" typeface="Sylfaen"/>
+        <a:font script="Armn" typeface="Arial"/>
+        <a:font script="Bugi" typeface="Leelawadee UI"/>
+        <a:font script="Bopo" typeface="Microsoft JhengHei"/>
+        <a:font script="Java" typeface="Javanese Text"/>
+        <a:font script="Lisu" typeface="Segoe UI"/>
+        <a:font script="Mymr" typeface="Myanmar Text"/>
+        <a:font script="Nkoo" typeface="Ebrima"/>
+        <a:font script="Olck" typeface="Nirmala UI"/>
+        <a:font script="Osma" typeface="Ebrima"/>
+        <a:font script="Phag" typeface="Phagspa"/>
+        <a:font script="Syrn" typeface="Estrangelo Edessa"/>
+        <a:font script="Syrj" typeface="Estrangelo Edessa"/>
+        <a:font script="Syre" typeface="Estrangelo Edessa"/>
+        <a:font script="Sora" typeface="Nirmala UI"/>
+        <a:font script="Tale" typeface="Microsoft Tai Le"/>
+        <a:font script="Talu" typeface="Microsoft New Tai Lue"/>
+        <a:font script="Tfng" typeface="Ebrima"/>
+      </a:minorFont>
+    </a:fontScheme>
+    <a:fmtScheme name="Office">
+      <a:fillStyleLst>
+        <a:solidFill>
+          <a:schemeClr val="phClr"/>
+        </a:solidFill>
+        <a:gradFill rotWithShape="1">
+          <a:gsLst>
+            <a:gs pos="0">
+              <a:schemeClr val="phClr">
+                <a:lumMod val="110000"/>
+                <a:satMod val="105000"/>
+                <a:tint val="67000"/>
+              </a:schemeClr>
+            </a:gs>
+            <a:gs pos="50000">
+              <a:schemeClr val="phClr">
+                <a:lumMod val="105000"/>
+                <a:satMod val="103000"/>
+                <a:tint val="73000"/>
+              </a:schemeClr>
+            </a:gs>
+            <a:gs pos="100000">
+              <a:schemeClr val="phClr">
+                <a:lumMod val="105000"/>
+                <a:satMod val="109000"/>
+                <a:tint val="81000"/>
+              </a:schemeClr>
+            </a:gs>
+          </a:gsLst>
+          <a:lin ang="5400000" scaled="0"/>
+        </a:gradFill>
+        <a:gradFill rotWithShape="1">
+          <a:gsLst>
+            <a:gs pos="0">
+              <a:schemeClr val="phClr">
+                <a:satMod val="103000"/>
+                <a:lumMod val="102000"/>
+                <a:tint val="94000"/>
+              </a:schemeClr>
+            </a:gs>
+            <a:gs pos="50000">
+              <a:schemeClr val="phClr">
+                <a:satMod val="110000"/>
+                <a:lumMod val="100000"/>
+                <a:shade val="100000"/>
+              </a:schemeClr>
+            </a:gs>
+            <a:gs pos="100000">
+              <a:schemeClr val="phClr">
+                <a:lumMod val="99000"/>
+                <a:satMod val="120000"/>
+                <a:shade val="78000"/>
+              </a:schemeClr>
+            </a:gs>
+          </a:gsLst>
+          <a:lin ang="5400000" scaled="0"/>
+        </a:gradFill>
+      </a:fillStyleLst>
+      <a:lnStyleLst>
+        <a:ln w="12700" cap="flat" cmpd="sng" algn="ctr">
+          <a:solidFill>
+            <a:schemeClr val="phClr"/>
+          </a:solidFill>
+          <a:prstDash val="solid"/>
+          <a:miter lim="800000"/>
+        </a:ln>
+        <a:ln w="19050" cap="flat" cmpd="sng" algn="ctr">
+          <a:solidFill>
+            <a:schemeClr val="phClr"/>
+          </a:solidFill>
+          <a:prstDash val="solid"/>
+          <a:miter lim="800000"/>
+        </a:ln>
+        <a:ln w="25400" cap="flat" cmpd="sng" algn="ctr">
+          <a:solidFill>
+            <a:schemeClr val="phClr"/>
+          </a:solidFill>
+          <a:prstDash val="solid"/>
+          <a:miter lim="800000"/>
+        </a:ln>
+      </a:lnStyleLst>
+      <a:effectStyleLst>
+        <a:effectStyle>
+          <a:effectLst/>
+        </a:effectStyle>
+        <a:effectStyle>
+          <a:effectLst/>
+        </a:effectStyle>
+        <a:effectStyle>
+          <a:effectLst>
+            <a:outerShdw blurRad="57150" dist="19050" dir="5400000" algn="ctr" rotWithShape="0">
+              <a:srgbClr val="000000">
+                <a:alpha val="63000"/>
+              </a:srgbClr>
+            </a:outerShdw>
+          </a:effectLst>
+        </a:effectStyle>
+      </a:effectStyleLst>
+      <a:bgFillStyleLst>
+        <a:solidFill>
+          <a:schemeClr val="phClr"/>
+        </a:solidFill>
+        <a:solidFill>
+          <a:schemeClr val="phClr">
+            <a:tint val="95000"/>
+            <a:satMod val="170000"/>
+          </a:schemeClr>
+        </a:solidFill>
+        <a:gradFill rotWithShape="1">
+          <a:gsLst>
+            <a:gs pos="0">
+              <a:schemeClr val="phClr">
+                <a:tint val="93000"/>
+                <a:satMod val="150000"/>
+                <a:shade val="98000"/>
+                <a:lumMod val="102000"/>
+              </a:schemeClr>
+            </a:gs>
+            <a:gs pos="50000">
+              <a:schemeClr val="phClr">
+                <a:tint val="98000"/>
+                <a:satMod val="130000"/>
+                <a:shade val="90000"/>
+                <a:lumMod val="103000"/>
+              </a:schemeClr>
+            </a:gs>
+            <a:gs pos="100000">
+              <a:schemeClr val="phClr">
+                <a:shade val="63000"/>
+                <a:satMod val="120000"/>
+              </a:schemeClr>
+            </a:gs>
+          </a:gsLst>
+          <a:lin ang="5400000" scaled="0"/>
+        </a:gradFill>
+      </a:bgFillStyleLst>
+    </a:fmtScheme>
+  </a:themeElements>
+  <a:objectDefaults>
+    <a:lnDef>
+      <a:spPr/>
+      <a:bodyPr/>
+      <a:lstStyle/>
+      <a:style>
+        <a:lnRef idx="2">
+          <a:schemeClr val="accent1"/>
+        </a:lnRef>
+        <a:fillRef idx="0">
+          <a:schemeClr val="accent1"/>
+        </a:fillRef>
+        <a:effectRef idx="1">
+          <a:schemeClr val="accent1"/>
+        </a:effectRef>
+        <a:fontRef idx="minor">
+          <a:schemeClr val="tx1"/>
+        </a:fontRef>
+      </a:style>
+    </a:lnDef>
+  </a:objectDefaults>
+  <a:extraClrSchemeLst/>
+  <a:extLst>
+    <a:ext uri="{05A4C25C-085E-4340-85A3-A5531E510DB2}">
+      <thm15:themeFamily xmlns:thm15="http://schemas.microsoft.com/office/thememl/2012/main" name="Office Theme" id="{2E142A2C-CD16-42D6-873A-C26D2A0506FA}" vid="{1BDDFF52-6CD6-40A5-AB3C-68EB2F1E4D0A}"/>
+    </a:ext>
+  </a:extLst>
+</a:theme>
+</file>
+
 <file path=customXml/item1.xml><?xml version="1.0" encoding="utf-8"?>
+<p:properties xmlns:p="http://schemas.microsoft.com/office/2006/metadata/properties" xmlns:xsi="http://www.w3.org/2001/XMLSchema-instance" xmlns:pc="http://schemas.microsoft.com/office/infopath/2007/PartnerControls">
+  <documentManagement>
+    <lcf76f155ced4ddcb4097134ff3c332f xmlns="2a629f63-19d6-4dc7-915a-386da3ce27bb">
+      <Terms xmlns="http://schemas.microsoft.com/office/infopath/2007/PartnerControls"/>
+    </lcf76f155ced4ddcb4097134ff3c332f>
+    <TaxCatchAll xmlns="8dc885b7-d181-4a47-9ffc-09ea82d2f3f1" xsi:nil="true"/>
+  </documentManagement>
+</p:properties>
+</file>
+
+<file path=customXml/item2.xml><?xml version="1.0" encoding="utf-8"?>
+<?mso-contentType ?>
+<FormTemplates xmlns="http://schemas.microsoft.com/sharepoint/v3/contenttype/forms">
+  <Display>DocumentLibraryForm</Display>
+  <Edit>DocumentLibraryForm</Edit>
+  <New>DocumentLibraryForm</New>
+</FormTemplates>
+</file>
+
+<file path=customXml/item3.xml><?xml version="1.0" encoding="utf-8"?>
 <ct:contentTypeSchema xmlns:ct="http://schemas.microsoft.com/office/2006/metadata/contentType" xmlns:ma="http://schemas.microsoft.com/office/2006/metadata/properties/metaAttributes" ct:_="" ma:_="" ma:contentTypeName="Documento" ma:contentTypeID="0x010100CC32FCBA8803BB45BAA212B815218780" ma:contentTypeVersion="10" ma:contentTypeDescription="Crear nuevo documento." ma:contentTypeScope="" ma:versionID="2d1d5923ebf970403a81b54c5913fa57">
   <xsd:schema xmlns:xsd="http://www.w3.org/2001/XMLSchema" xmlns:xs="http://www.w3.org/2001/XMLSchema" xmlns:p="http://schemas.microsoft.com/office/2006/metadata/properties" xmlns:ns2="2a629f63-19d6-4dc7-915a-386da3ce27bb" xmlns:ns3="8dc885b7-d181-4a47-9ffc-09ea82d2f3f1" targetNamespace="http://schemas.microsoft.com/office/2006/metadata/properties" ma:root="true" ma:fieldsID="e6b8f1356910a39292bd7bea32016a72" ns2:_="" ns3:_="">
     <xsd:import namespace="2a629f63-19d6-4dc7-915a-386da3ce27bb"/>
@@ -5614,36 +6742,42 @@
 </ct:contentTypeSchema>
 </file>
 
-<file path=customXml/item2.xml><?xml version="1.0" encoding="utf-8"?>
-<?mso-contentType ?>
-<FormTemplates xmlns="http://schemas.microsoft.com/sharepoint/v3/contenttype/forms">
-  <Display>DocumentLibraryForm</Display>
-  <Edit>DocumentLibraryForm</Edit>
-  <New>DocumentLibraryForm</New>
-</FormTemplates>
-</file>
-
-<file path=customXml/item3.xml><?xml version="1.0" encoding="utf-8"?>
-<p:properties xmlns:p="http://schemas.microsoft.com/office/2006/metadata/properties" xmlns:xsi="http://www.w3.org/2001/XMLSchema-instance" xmlns:pc="http://schemas.microsoft.com/office/infopath/2007/PartnerControls">
-  <documentManagement>
-    <lcf76f155ced4ddcb4097134ff3c332f xmlns="2a629f63-19d6-4dc7-915a-386da3ce27bb">
-      <Terms xmlns="http://schemas.microsoft.com/office/infopath/2007/PartnerControls"/>
-    </lcf76f155ced4ddcb4097134ff3c332f>
-    <TaxCatchAll xmlns="8dc885b7-d181-4a47-9ffc-09ea82d2f3f1" xsi:nil="true"/>
-  </documentManagement>
-</p:properties>
-</file>
-
 <file path=customXml/itemProps1.xml><?xml version="1.0" encoding="utf-8"?>
-<ds:datastoreItem xmlns:ds="http://schemas.openxmlformats.org/officeDocument/2006/customXml" ds:itemID="{8412DB53-90AF-4B14-9270-4D16826B53E0}"/>
+<ds:datastoreItem xmlns:ds="http://schemas.openxmlformats.org/officeDocument/2006/customXml" ds:itemID="{C80B84DD-9DAF-40BD-A2CC-02B5EF3C8CE9}">
+  <ds:schemaRefs>
+    <ds:schemaRef ds:uri="http://schemas.microsoft.com/office/2006/metadata/properties"/>
+    <ds:schemaRef ds:uri="http://schemas.microsoft.com/office/infopath/2007/PartnerControls"/>
+    <ds:schemaRef ds:uri="2a629f63-19d6-4dc7-915a-386da3ce27bb"/>
+    <ds:schemaRef ds:uri="8dc885b7-d181-4a47-9ffc-09ea82d2f3f1"/>
+  </ds:schemaRefs>
+</ds:datastoreItem>
 </file>
 
 <file path=customXml/itemProps2.xml><?xml version="1.0" encoding="utf-8"?>
-<ds:datastoreItem xmlns:ds="http://schemas.openxmlformats.org/officeDocument/2006/customXml" ds:itemID="{B1786972-6236-4A3B-8801-9DE87C2746E3}"/>
+<ds:datastoreItem xmlns:ds="http://schemas.openxmlformats.org/officeDocument/2006/customXml" ds:itemID="{B1786972-6236-4A3B-8801-9DE87C2746E3}">
+  <ds:schemaRefs>
+    <ds:schemaRef ds:uri="http://schemas.microsoft.com/sharepoint/v3/contenttype/forms"/>
+  </ds:schemaRefs>
+</ds:datastoreItem>
 </file>
 
 <file path=customXml/itemProps3.xml><?xml version="1.0" encoding="utf-8"?>
-<ds:datastoreItem xmlns:ds="http://schemas.openxmlformats.org/officeDocument/2006/customXml" ds:itemID="{C80B84DD-9DAF-40BD-A2CC-02B5EF3C8CE9}"/>
+<ds:datastoreItem xmlns:ds="http://schemas.openxmlformats.org/officeDocument/2006/customXml" ds:itemID="{8412DB53-90AF-4B14-9270-4D16826B53E0}">
+  <ds:schemaRefs>
+    <ds:schemaRef ds:uri="http://schemas.microsoft.com/office/2006/metadata/contentType"/>
+    <ds:schemaRef ds:uri="http://schemas.microsoft.com/office/2006/metadata/properties/metaAttributes"/>
+    <ds:schemaRef ds:uri="http://www.w3.org/2001/XMLSchema"/>
+    <ds:schemaRef ds:uri="http://schemas.microsoft.com/office/2006/metadata/properties"/>
+    <ds:schemaRef ds:uri="2a629f63-19d6-4dc7-915a-386da3ce27bb"/>
+    <ds:schemaRef ds:uri="8dc885b7-d181-4a47-9ffc-09ea82d2f3f1"/>
+    <ds:schemaRef ds:uri="http://schemas.microsoft.com/office/2006/documentManagement/types"/>
+    <ds:schemaRef ds:uri="http://schemas.microsoft.com/office/infopath/2007/PartnerControls"/>
+    <ds:schemaRef ds:uri="http://schemas.openxmlformats.org/package/2006/metadata/core-properties"/>
+    <ds:schemaRef ds:uri="http://purl.org/dc/elements/1.1/"/>
+    <ds:schemaRef ds:uri="http://purl.org/dc/terms/"/>
+    <ds:schemaRef ds:uri="http://schemas.microsoft.com/internal/obd"/>
+  </ds:schemaRefs>
+</ds:datastoreItem>
 </file>
 
 <file path=docMetadata/LabelInfo.xml><?xml version="1.0" encoding="utf-8"?>
